--- a/Presentations/extra_sens_runs.pptx
+++ b/Presentations/extra_sens_runs.pptx
@@ -17,6 +17,8 @@
     <p:sldId id="264" r:id="rId11"/>
     <p:sldId id="265" r:id="rId12"/>
     <p:sldId id="267" r:id="rId13"/>
+    <p:sldId id="270" r:id="rId14"/>
+    <p:sldId id="271" r:id="rId15"/>
   </p:sldIdLst>
   <p:sldSz cx="12192000" cy="6858000"/>
   <p:notesSz cx="6858000" cy="9144000"/>
@@ -115,6 +117,11 @@
       </a:defRPr>
     </a:lvl9pPr>
   </p:defaultTextStyle>
+  <p:extLst>
+    <p:ext uri="{EFAFB233-063F-42B5-8137-9DF3F51BA10A}">
+      <p15:sldGuideLst xmlns:p15="http://schemas.microsoft.com/office/powerpoint/2012/main"/>
+    </p:ext>
+  </p:extLst>
 </p:presentation>
 </file>
 
@@ -3720,6 +3727,313 @@
     <p:extLst>
       <p:ext uri="{BB962C8B-B14F-4D97-AF65-F5344CB8AC3E}">
         <p14:creationId xmlns:p14="http://schemas.microsoft.com/office/powerpoint/2010/main" val="1226161898"/>
+      </p:ext>
+    </p:extLst>
+  </p:cSld>
+  <p:clrMapOvr>
+    <a:masterClrMapping/>
+  </p:clrMapOvr>
+</p:sld>
+</file>
+
+<file path=ppt/slides/slide13.xml><?xml version="1.0" encoding="utf-8"?>
+<p:sld xmlns:a="http://schemas.openxmlformats.org/drawingml/2006/main" xmlns:r="http://schemas.openxmlformats.org/officeDocument/2006/relationships" xmlns:p="http://schemas.openxmlformats.org/presentationml/2006/main">
+  <p:cSld>
+    <p:spTree>
+      <p:nvGrpSpPr>
+        <p:cNvPr id="1" name=""/>
+        <p:cNvGrpSpPr/>
+        <p:nvPr/>
+      </p:nvGrpSpPr>
+      <p:grpSpPr>
+        <a:xfrm>
+          <a:off x="0" y="0"/>
+          <a:ext cx="0" cy="0"/>
+          <a:chOff x="0" y="0"/>
+          <a:chExt cx="0" cy="0"/>
+        </a:xfrm>
+      </p:grpSpPr>
+      <p:sp>
+        <p:nvSpPr>
+          <p:cNvPr id="2" name="Title 1">
+            <a:extLst>
+              <a:ext uri="{FF2B5EF4-FFF2-40B4-BE49-F238E27FC236}">
+                <a16:creationId xmlns:a16="http://schemas.microsoft.com/office/drawing/2014/main" id="{D383EA4E-4774-1D03-BEBE-CE37CA8D3B93}"/>
+              </a:ext>
+            </a:extLst>
+          </p:cNvPr>
+          <p:cNvSpPr>
+            <a:spLocks noGrp="1"/>
+          </p:cNvSpPr>
+          <p:nvPr>
+            <p:ph type="title"/>
+          </p:nvPr>
+        </p:nvSpPr>
+        <p:spPr/>
+        <p:txBody>
+          <a:bodyPr/>
+          <a:lstStyle/>
+          <a:p>
+            <a:r>
+              <a:rPr lang="en-US" dirty="0"/>
+              <a:t>Loosening the M prior</a:t>
+            </a:r>
+          </a:p>
+        </p:txBody>
+      </p:sp>
+      <p:sp>
+        <p:nvSpPr>
+          <p:cNvPr id="4" name="Content Placeholder 2">
+            <a:extLst>
+              <a:ext uri="{FF2B5EF4-FFF2-40B4-BE49-F238E27FC236}">
+                <a16:creationId xmlns:a16="http://schemas.microsoft.com/office/drawing/2014/main" id="{98E38ADB-311C-DC3E-D727-DC8EB455EE85}"/>
+              </a:ext>
+            </a:extLst>
+          </p:cNvPr>
+          <p:cNvSpPr>
+            <a:spLocks noGrp="1"/>
+          </p:cNvSpPr>
+          <p:nvPr>
+            <p:ph idx="1"/>
+          </p:nvPr>
+        </p:nvSpPr>
+        <p:spPr>
+          <a:xfrm>
+            <a:off x="838201" y="1825625"/>
+            <a:ext cx="3672016" cy="4351338"/>
+          </a:xfrm>
+        </p:spPr>
+        <p:txBody>
+          <a:bodyPr>
+            <a:normAutofit/>
+          </a:bodyPr>
+          <a:lstStyle/>
+          <a:p>
+            <a:r>
+              <a:rPr lang="en-US" dirty="0"/>
+              <a:t>Changing 26.1i_1Reg_Cont_Upd_No_wAI_LLS</a:t>
+            </a:r>
+          </a:p>
+          <a:p>
+            <a:r>
+              <a:rPr lang="en-US" dirty="0"/>
+              <a:t>Change M </a:t>
+            </a:r>
+            <a:r>
+              <a:rPr lang="en-US" dirty="0" err="1"/>
+              <a:t>sd</a:t>
+            </a:r>
+            <a:r>
+              <a:rPr lang="en-US" dirty="0"/>
+              <a:t> prior from 0.1 to 0.3</a:t>
+            </a:r>
+          </a:p>
+          <a:p>
+            <a:r>
+              <a:rPr lang="en-US" dirty="0"/>
+              <a:t>Model “converges” but scale seems implausible</a:t>
+            </a:r>
+          </a:p>
+          <a:p>
+            <a:endParaRPr lang="en-US" dirty="0"/>
+          </a:p>
+        </p:txBody>
+      </p:sp>
+      <p:pic>
+        <p:nvPicPr>
+          <p:cNvPr id="6" name="Picture 5">
+            <a:extLst>
+              <a:ext uri="{FF2B5EF4-FFF2-40B4-BE49-F238E27FC236}">
+                <a16:creationId xmlns:a16="http://schemas.microsoft.com/office/drawing/2014/main" id="{2A158296-B537-1EC5-1792-6C53EF7EC71D}"/>
+              </a:ext>
+            </a:extLst>
+          </p:cNvPr>
+          <p:cNvPicPr>
+            <a:picLocks noChangeAspect="1"/>
+          </p:cNvPicPr>
+          <p:nvPr/>
+        </p:nvPicPr>
+        <p:blipFill>
+          <a:blip r:embed="rId2"/>
+          <a:stretch>
+            <a:fillRect/>
+          </a:stretch>
+        </p:blipFill>
+        <p:spPr>
+          <a:xfrm>
+            <a:off x="4419600" y="1825625"/>
+            <a:ext cx="7772400" cy="4041648"/>
+          </a:xfrm>
+          <a:prstGeom prst="rect">
+            <a:avLst/>
+          </a:prstGeom>
+        </p:spPr>
+      </p:pic>
+    </p:spTree>
+    <p:extLst>
+      <p:ext uri="{BB962C8B-B14F-4D97-AF65-F5344CB8AC3E}">
+        <p14:creationId xmlns:p14="http://schemas.microsoft.com/office/powerpoint/2010/main" val="2005717598"/>
+      </p:ext>
+    </p:extLst>
+  </p:cSld>
+  <p:clrMapOvr>
+    <a:masterClrMapping/>
+  </p:clrMapOvr>
+</p:sld>
+</file>
+
+<file path=ppt/slides/slide14.xml><?xml version="1.0" encoding="utf-8"?>
+<p:sld xmlns:a="http://schemas.openxmlformats.org/drawingml/2006/main" xmlns:r="http://schemas.openxmlformats.org/officeDocument/2006/relationships" xmlns:p="http://schemas.openxmlformats.org/presentationml/2006/main">
+  <p:cSld>
+    <p:spTree>
+      <p:nvGrpSpPr>
+        <p:cNvPr id="1" name="">
+          <a:extLst>
+            <a:ext uri="{FF2B5EF4-FFF2-40B4-BE49-F238E27FC236}">
+              <a16:creationId xmlns:a16="http://schemas.microsoft.com/office/drawing/2014/main" id="{77DACD79-8CB0-7431-7498-4C72B0926EC6}"/>
+            </a:ext>
+          </a:extLst>
+        </p:cNvPr>
+        <p:cNvGrpSpPr/>
+        <p:nvPr/>
+      </p:nvGrpSpPr>
+      <p:grpSpPr>
+        <a:xfrm>
+          <a:off x="0" y="0"/>
+          <a:ext cx="0" cy="0"/>
+          <a:chOff x="0" y="0"/>
+          <a:chExt cx="0" cy="0"/>
+        </a:xfrm>
+      </p:grpSpPr>
+      <p:sp>
+        <p:nvSpPr>
+          <p:cNvPr id="2" name="Title 1">
+            <a:extLst>
+              <a:ext uri="{FF2B5EF4-FFF2-40B4-BE49-F238E27FC236}">
+                <a16:creationId xmlns:a16="http://schemas.microsoft.com/office/drawing/2014/main" id="{D168AD0B-9322-B563-8CB2-E3EE82307AA1}"/>
+              </a:ext>
+            </a:extLst>
+          </p:cNvPr>
+          <p:cNvSpPr>
+            <a:spLocks noGrp="1"/>
+          </p:cNvSpPr>
+          <p:nvPr>
+            <p:ph type="title"/>
+          </p:nvPr>
+        </p:nvSpPr>
+        <p:spPr/>
+        <p:txBody>
+          <a:bodyPr/>
+          <a:lstStyle/>
+          <a:p>
+            <a:r>
+              <a:rPr lang="en-US" dirty="0"/>
+              <a:t>Loosening the M prior</a:t>
+            </a:r>
+          </a:p>
+        </p:txBody>
+      </p:sp>
+      <p:sp>
+        <p:nvSpPr>
+          <p:cNvPr id="4" name="Content Placeholder 2">
+            <a:extLst>
+              <a:ext uri="{FF2B5EF4-FFF2-40B4-BE49-F238E27FC236}">
+                <a16:creationId xmlns:a16="http://schemas.microsoft.com/office/drawing/2014/main" id="{8F52D313-5938-7A6D-8B8B-9C7B29DC28FB}"/>
+              </a:ext>
+            </a:extLst>
+          </p:cNvPr>
+          <p:cNvSpPr>
+            <a:spLocks noGrp="1"/>
+          </p:cNvSpPr>
+          <p:nvPr>
+            <p:ph idx="1"/>
+          </p:nvPr>
+        </p:nvSpPr>
+        <p:spPr>
+          <a:xfrm>
+            <a:off x="838201" y="1825625"/>
+            <a:ext cx="3672016" cy="4351338"/>
+          </a:xfrm>
+        </p:spPr>
+        <p:txBody>
+          <a:bodyPr>
+            <a:normAutofit lnSpcReduction="10000"/>
+          </a:bodyPr>
+          <a:lstStyle/>
+          <a:p>
+            <a:r>
+              <a:rPr lang="en-US" dirty="0"/>
+              <a:t>Changing 26.2b_FAA_3Flt_LLS_Only </a:t>
+            </a:r>
+          </a:p>
+          <a:p>
+            <a:r>
+              <a:rPr lang="en-US" dirty="0"/>
+              <a:t>Similar results to single region sensitivity model …</a:t>
+            </a:r>
+          </a:p>
+          <a:p>
+            <a:r>
+              <a:rPr lang="en-US" dirty="0"/>
+              <a:t>Change M </a:t>
+            </a:r>
+            <a:r>
+              <a:rPr lang="en-US" dirty="0" err="1"/>
+              <a:t>sd</a:t>
+            </a:r>
+            <a:r>
+              <a:rPr lang="en-US" dirty="0"/>
+              <a:t> prior from 0.1 to 0.3</a:t>
+            </a:r>
+          </a:p>
+          <a:p>
+            <a:r>
+              <a:rPr lang="en-US" dirty="0"/>
+              <a:t>Model “converges” but scale seems implausible</a:t>
+            </a:r>
+          </a:p>
+          <a:p>
+            <a:endParaRPr lang="en-US" dirty="0"/>
+          </a:p>
+          <a:p>
+            <a:endParaRPr lang="en-US" dirty="0"/>
+          </a:p>
+        </p:txBody>
+      </p:sp>
+      <p:pic>
+        <p:nvPicPr>
+          <p:cNvPr id="5" name="Picture 4">
+            <a:extLst>
+              <a:ext uri="{FF2B5EF4-FFF2-40B4-BE49-F238E27FC236}">
+                <a16:creationId xmlns:a16="http://schemas.microsoft.com/office/drawing/2014/main" id="{0552389C-FDE8-9DC2-0DB8-9601FCB45D2A}"/>
+              </a:ext>
+            </a:extLst>
+          </p:cNvPr>
+          <p:cNvPicPr>
+            <a:picLocks noChangeAspect="1"/>
+          </p:cNvPicPr>
+          <p:nvPr/>
+        </p:nvPicPr>
+        <p:blipFill>
+          <a:blip r:embed="rId2"/>
+          <a:stretch>
+            <a:fillRect/>
+          </a:stretch>
+        </p:blipFill>
+        <p:spPr>
+          <a:xfrm>
+            <a:off x="4419600" y="2135315"/>
+            <a:ext cx="7772400" cy="4041648"/>
+          </a:xfrm>
+          <a:prstGeom prst="rect">
+            <a:avLst/>
+          </a:prstGeom>
+        </p:spPr>
+      </p:pic>
+    </p:spTree>
+    <p:extLst>
+      <p:ext uri="{BB962C8B-B14F-4D97-AF65-F5344CB8AC3E}">
+        <p14:creationId xmlns:p14="http://schemas.microsoft.com/office/powerpoint/2010/main" val="2206280504"/>
       </p:ext>
     </p:extLst>
   </p:cSld>
